--- a/ReportAndPPT/AcendlyPPT.pptx
+++ b/ReportAndPPT/AcendlyPPT.pptx
@@ -6320,7 +6320,19 @@
                 <a:cs typeface="Times New Roman"/>
                 <a:sym typeface="Times New Roman"/>
               </a:rPr>
-              <a:t>Dr. Monika Aggarwal</a:t>
+              <a:t>Dr. </a:t>
+            </a:r>
+            <a:r>
+              <a:rPr b="1" lang="en-IN" sz="1800">
+                <a:solidFill>
+                  <a:schemeClr val="dk1"/>
+                </a:solidFill>
+                <a:latin typeface="Times New Roman"/>
+                <a:ea typeface="Times New Roman"/>
+                <a:cs typeface="Times New Roman"/>
+                <a:sym typeface="Times New Roman"/>
+              </a:rPr>
+              <a:t>Simarjit Kaur</a:t>
             </a:r>
             <a:endParaRPr b="0" sz="2000" strike="noStrike">
               <a:solidFill>
